--- a/Tableau de bord/Tableau de bord semaine 4.pptx
+++ b/Tableau de bord/Tableau de bord semaine 4.pptx
@@ -6,6 +6,17 @@
   </p:sldMasterIdLst>
   <p:sldIdLst>
     <p:sldId id="256" r:id="rId5"/>
+    <p:sldId id="257" r:id="rId6"/>
+    <p:sldId id="258" r:id="rId7"/>
+    <p:sldId id="271" r:id="rId8"/>
+    <p:sldId id="259" r:id="rId9"/>
+    <p:sldId id="260" r:id="rId10"/>
+    <p:sldId id="275" r:id="rId11"/>
+    <p:sldId id="261" r:id="rId12"/>
+    <p:sldId id="272" r:id="rId13"/>
+    <p:sldId id="273" r:id="rId14"/>
+    <p:sldId id="276" r:id="rId15"/>
+    <p:sldId id="274" r:id="rId16"/>
   </p:sldIdLst>
   <p:sldSz cx="12192000" cy="6858000"/>
   <p:notesSz cx="6858000" cy="9144000"/>
@@ -112,16 +123,269 @@
 </p:presentation>
 </file>
 
-<file path=ppt/revisionInfo.xml><?xml version="1.0" encoding="utf-8"?>
-<p1510:revInfo xmlns:a="http://schemas.openxmlformats.org/drawingml/2006/main" xmlns:r="http://schemas.openxmlformats.org/officeDocument/2006/relationships" xmlns:p1510="http://schemas.microsoft.com/office/powerpoint/2015/10/main">
-  <p1510:revLst>
-    <p1510:client id="{E9AFCF45-42EA-40EF-8C91-A07AB6F9A7F4}" v="4" dt="2025-01-22T18:34:00.235"/>
-  </p1510:revLst>
-</p1510:revInfo>
-</file>
-
 <file path=ppt/changesInfos/changesInfo1.xml><?xml version="1.0" encoding="utf-8"?>
 <pc:chgInfo xmlns:a="http://schemas.openxmlformats.org/drawingml/2006/main" xmlns:r="http://schemas.openxmlformats.org/officeDocument/2006/relationships" xmlns:ac="http://schemas.microsoft.com/office/drawing/2013/main/command" xmlns:pc="http://schemas.microsoft.com/office/powerpoint/2013/main/command">
+  <pc:docChgLst>
+    <pc:chgData name="Guillaume Béland" userId="5e0e8ca1-aad6-45fd-bfe1-42de3018897a" providerId="ADAL" clId="{55D394F1-6066-4DF6-B78A-7FB94D6B7DC3}"/>
+    <pc:docChg chg="custSel addSld delSld modSld">
+      <pc:chgData name="Guillaume Béland" userId="5e0e8ca1-aad6-45fd-bfe1-42de3018897a" providerId="ADAL" clId="{55D394F1-6066-4DF6-B78A-7FB94D6B7DC3}" dt="2025-02-19T19:03:41.104" v="203" actId="5793"/>
+      <pc:docMkLst>
+        <pc:docMk/>
+      </pc:docMkLst>
+      <pc:sldChg chg="addSp delSp modSp new mod">
+        <pc:chgData name="Guillaume Béland" userId="5e0e8ca1-aad6-45fd-bfe1-42de3018897a" providerId="ADAL" clId="{55D394F1-6066-4DF6-B78A-7FB94D6B7DC3}" dt="2025-02-19T18:31:13.463" v="44" actId="1076"/>
+        <pc:sldMkLst>
+          <pc:docMk/>
+          <pc:sldMk cId="1646788340" sldId="257"/>
+        </pc:sldMkLst>
+        <pc:picChg chg="add mod">
+          <ac:chgData name="Guillaume Béland" userId="5e0e8ca1-aad6-45fd-bfe1-42de3018897a" providerId="ADAL" clId="{55D394F1-6066-4DF6-B78A-7FB94D6B7DC3}" dt="2025-02-19T18:31:02.185" v="41" actId="14100"/>
+          <ac:picMkLst>
+            <pc:docMk/>
+            <pc:sldMk cId="1646788340" sldId="257"/>
+            <ac:picMk id="5" creationId="{0FCA3DDE-9669-D568-B0F7-B203F81A2E95}"/>
+          </ac:picMkLst>
+        </pc:picChg>
+        <pc:picChg chg="add mod">
+          <ac:chgData name="Guillaume Béland" userId="5e0e8ca1-aad6-45fd-bfe1-42de3018897a" providerId="ADAL" clId="{55D394F1-6066-4DF6-B78A-7FB94D6B7DC3}" dt="2025-02-19T18:31:13.463" v="44" actId="1076"/>
+          <ac:picMkLst>
+            <pc:docMk/>
+            <pc:sldMk cId="1646788340" sldId="257"/>
+            <ac:picMk id="7" creationId="{B605890D-BD52-3785-C0B4-28EAB48B2B96}"/>
+          </ac:picMkLst>
+        </pc:picChg>
+      </pc:sldChg>
+      <pc:sldChg chg="addSp modSp new mod">
+        <pc:chgData name="Guillaume Béland" userId="5e0e8ca1-aad6-45fd-bfe1-42de3018897a" providerId="ADAL" clId="{55D394F1-6066-4DF6-B78A-7FB94D6B7DC3}" dt="2025-02-19T18:28:48.153" v="31" actId="1076"/>
+        <pc:sldMkLst>
+          <pc:docMk/>
+          <pc:sldMk cId="3381310881" sldId="258"/>
+        </pc:sldMkLst>
+        <pc:picChg chg="add mod modCrop">
+          <ac:chgData name="Guillaume Béland" userId="5e0e8ca1-aad6-45fd-bfe1-42de3018897a" providerId="ADAL" clId="{55D394F1-6066-4DF6-B78A-7FB94D6B7DC3}" dt="2025-02-19T18:28:48.153" v="31" actId="1076"/>
+          <ac:picMkLst>
+            <pc:docMk/>
+            <pc:sldMk cId="3381310881" sldId="258"/>
+            <ac:picMk id="5" creationId="{AE3CBFF0-62E4-CDA0-5394-9B1357F7E51F}"/>
+          </ac:picMkLst>
+        </pc:picChg>
+      </pc:sldChg>
+      <pc:sldChg chg="modSp new mod">
+        <pc:chgData name="Guillaume Béland" userId="5e0e8ca1-aad6-45fd-bfe1-42de3018897a" providerId="ADAL" clId="{55D394F1-6066-4DF6-B78A-7FB94D6B7DC3}" dt="2025-02-19T18:51:18.894" v="53" actId="20577"/>
+        <pc:sldMkLst>
+          <pc:docMk/>
+          <pc:sldMk cId="2761858454" sldId="259"/>
+        </pc:sldMkLst>
+        <pc:spChg chg="mod">
+          <ac:chgData name="Guillaume Béland" userId="5e0e8ca1-aad6-45fd-bfe1-42de3018897a" providerId="ADAL" clId="{55D394F1-6066-4DF6-B78A-7FB94D6B7DC3}" dt="2025-02-19T18:51:18.894" v="53" actId="20577"/>
+          <ac:spMkLst>
+            <pc:docMk/>
+            <pc:sldMk cId="2761858454" sldId="259"/>
+            <ac:spMk id="2" creationId="{018CE68B-1906-CE2B-C12D-C1120444AEFD}"/>
+          </ac:spMkLst>
+        </pc:spChg>
+      </pc:sldChg>
+      <pc:sldChg chg="modSp new mod">
+        <pc:chgData name="Guillaume Béland" userId="5e0e8ca1-aad6-45fd-bfe1-42de3018897a" providerId="ADAL" clId="{55D394F1-6066-4DF6-B78A-7FB94D6B7DC3}" dt="2025-02-19T18:51:27.979" v="76" actId="20577"/>
+        <pc:sldMkLst>
+          <pc:docMk/>
+          <pc:sldMk cId="4022280378" sldId="260"/>
+        </pc:sldMkLst>
+        <pc:spChg chg="mod">
+          <ac:chgData name="Guillaume Béland" userId="5e0e8ca1-aad6-45fd-bfe1-42de3018897a" providerId="ADAL" clId="{55D394F1-6066-4DF6-B78A-7FB94D6B7DC3}" dt="2025-02-19T18:51:27.979" v="76" actId="20577"/>
+          <ac:spMkLst>
+            <pc:docMk/>
+            <pc:sldMk cId="4022280378" sldId="260"/>
+            <ac:spMk id="2" creationId="{0B578E11-147F-69DE-C9BD-CBE12A703B05}"/>
+          </ac:spMkLst>
+        </pc:spChg>
+      </pc:sldChg>
+      <pc:sldChg chg="modSp new mod">
+        <pc:chgData name="Guillaume Béland" userId="5e0e8ca1-aad6-45fd-bfe1-42de3018897a" providerId="ADAL" clId="{55D394F1-6066-4DF6-B78A-7FB94D6B7DC3}" dt="2025-02-19T18:55:41.644" v="132" actId="20577"/>
+        <pc:sldMkLst>
+          <pc:docMk/>
+          <pc:sldMk cId="2048541269" sldId="261"/>
+        </pc:sldMkLst>
+        <pc:spChg chg="mod">
+          <ac:chgData name="Guillaume Béland" userId="5e0e8ca1-aad6-45fd-bfe1-42de3018897a" providerId="ADAL" clId="{55D394F1-6066-4DF6-B78A-7FB94D6B7DC3}" dt="2025-02-19T18:55:23.453" v="90" actId="20577"/>
+          <ac:spMkLst>
+            <pc:docMk/>
+            <pc:sldMk cId="2048541269" sldId="261"/>
+            <ac:spMk id="2" creationId="{1E3CAE03-8603-9C38-7F06-23010C358EBF}"/>
+          </ac:spMkLst>
+        </pc:spChg>
+        <pc:spChg chg="mod">
+          <ac:chgData name="Guillaume Béland" userId="5e0e8ca1-aad6-45fd-bfe1-42de3018897a" providerId="ADAL" clId="{55D394F1-6066-4DF6-B78A-7FB94D6B7DC3}" dt="2025-02-19T18:55:41.644" v="132" actId="20577"/>
+          <ac:spMkLst>
+            <pc:docMk/>
+            <pc:sldMk cId="2048541269" sldId="261"/>
+            <ac:spMk id="3" creationId="{50CC7F30-CC1C-12DF-3B55-59A7FE1396F4}"/>
+          </ac:spMkLst>
+        </pc:spChg>
+      </pc:sldChg>
+      <pc:sldChg chg="new del">
+        <pc:chgData name="Guillaume Béland" userId="5e0e8ca1-aad6-45fd-bfe1-42de3018897a" providerId="ADAL" clId="{55D394F1-6066-4DF6-B78A-7FB94D6B7DC3}" dt="2025-02-19T18:55:58.757" v="145" actId="47"/>
+        <pc:sldMkLst>
+          <pc:docMk/>
+          <pc:sldMk cId="2584827305" sldId="262"/>
+        </pc:sldMkLst>
+      </pc:sldChg>
+      <pc:sldChg chg="new del">
+        <pc:chgData name="Guillaume Béland" userId="5e0e8ca1-aad6-45fd-bfe1-42de3018897a" providerId="ADAL" clId="{55D394F1-6066-4DF6-B78A-7FB94D6B7DC3}" dt="2025-02-19T18:55:59.306" v="146" actId="47"/>
+        <pc:sldMkLst>
+          <pc:docMk/>
+          <pc:sldMk cId="1514241613" sldId="263"/>
+        </pc:sldMkLst>
+      </pc:sldChg>
+      <pc:sldChg chg="new del">
+        <pc:chgData name="Guillaume Béland" userId="5e0e8ca1-aad6-45fd-bfe1-42de3018897a" providerId="ADAL" clId="{55D394F1-6066-4DF6-B78A-7FB94D6B7DC3}" dt="2025-02-19T18:55:59.798" v="147" actId="47"/>
+        <pc:sldMkLst>
+          <pc:docMk/>
+          <pc:sldMk cId="349655360" sldId="264"/>
+        </pc:sldMkLst>
+      </pc:sldChg>
+      <pc:sldChg chg="new del">
+        <pc:chgData name="Guillaume Béland" userId="5e0e8ca1-aad6-45fd-bfe1-42de3018897a" providerId="ADAL" clId="{55D394F1-6066-4DF6-B78A-7FB94D6B7DC3}" dt="2025-02-19T18:56:00.288" v="148" actId="47"/>
+        <pc:sldMkLst>
+          <pc:docMk/>
+          <pc:sldMk cId="654328289" sldId="265"/>
+        </pc:sldMkLst>
+      </pc:sldChg>
+      <pc:sldChg chg="new del">
+        <pc:chgData name="Guillaume Béland" userId="5e0e8ca1-aad6-45fd-bfe1-42de3018897a" providerId="ADAL" clId="{55D394F1-6066-4DF6-B78A-7FB94D6B7DC3}" dt="2025-02-19T18:56:00.812" v="149" actId="47"/>
+        <pc:sldMkLst>
+          <pc:docMk/>
+          <pc:sldMk cId="4284038635" sldId="266"/>
+        </pc:sldMkLst>
+      </pc:sldChg>
+      <pc:sldChg chg="new del">
+        <pc:chgData name="Guillaume Béland" userId="5e0e8ca1-aad6-45fd-bfe1-42de3018897a" providerId="ADAL" clId="{55D394F1-6066-4DF6-B78A-7FB94D6B7DC3}" dt="2025-02-19T18:56:01.236" v="150" actId="47"/>
+        <pc:sldMkLst>
+          <pc:docMk/>
+          <pc:sldMk cId="1814244089" sldId="267"/>
+        </pc:sldMkLst>
+      </pc:sldChg>
+      <pc:sldChg chg="new del">
+        <pc:chgData name="Guillaume Béland" userId="5e0e8ca1-aad6-45fd-bfe1-42de3018897a" providerId="ADAL" clId="{55D394F1-6066-4DF6-B78A-7FB94D6B7DC3}" dt="2025-02-19T18:56:01.910" v="151" actId="47"/>
+        <pc:sldMkLst>
+          <pc:docMk/>
+          <pc:sldMk cId="4023242696" sldId="268"/>
+        </pc:sldMkLst>
+      </pc:sldChg>
+      <pc:sldChg chg="new del">
+        <pc:chgData name="Guillaume Béland" userId="5e0e8ca1-aad6-45fd-bfe1-42de3018897a" providerId="ADAL" clId="{55D394F1-6066-4DF6-B78A-7FB94D6B7DC3}" dt="2025-02-19T18:56:02.476" v="152" actId="47"/>
+        <pc:sldMkLst>
+          <pc:docMk/>
+          <pc:sldMk cId="4093981573" sldId="269"/>
+        </pc:sldMkLst>
+      </pc:sldChg>
+      <pc:sldChg chg="new del">
+        <pc:chgData name="Guillaume Béland" userId="5e0e8ca1-aad6-45fd-bfe1-42de3018897a" providerId="ADAL" clId="{55D394F1-6066-4DF6-B78A-7FB94D6B7DC3}" dt="2025-02-19T18:56:03.159" v="153" actId="47"/>
+        <pc:sldMkLst>
+          <pc:docMk/>
+          <pc:sldMk cId="4192068569" sldId="270"/>
+        </pc:sldMkLst>
+      </pc:sldChg>
+      <pc:sldChg chg="modSp new mod">
+        <pc:chgData name="Guillaume Béland" userId="5e0e8ca1-aad6-45fd-bfe1-42de3018897a" providerId="ADAL" clId="{55D394F1-6066-4DF6-B78A-7FB94D6B7DC3}" dt="2025-02-19T18:51:35.607" v="83" actId="20577"/>
+        <pc:sldMkLst>
+          <pc:docMk/>
+          <pc:sldMk cId="2633862120" sldId="271"/>
+        </pc:sldMkLst>
+        <pc:spChg chg="mod">
+          <ac:chgData name="Guillaume Béland" userId="5e0e8ca1-aad6-45fd-bfe1-42de3018897a" providerId="ADAL" clId="{55D394F1-6066-4DF6-B78A-7FB94D6B7DC3}" dt="2025-02-19T18:51:35.607" v="83" actId="20577"/>
+          <ac:spMkLst>
+            <pc:docMk/>
+            <pc:sldMk cId="2633862120" sldId="271"/>
+            <ac:spMk id="2" creationId="{DC949780-FA16-5E70-E105-128DC080D830}"/>
+          </ac:spMkLst>
+        </pc:spChg>
+      </pc:sldChg>
+      <pc:sldChg chg="modSp add mod">
+        <pc:chgData name="Guillaume Béland" userId="5e0e8ca1-aad6-45fd-bfe1-42de3018897a" providerId="ADAL" clId="{55D394F1-6066-4DF6-B78A-7FB94D6B7DC3}" dt="2025-02-19T18:55:49.202" v="137" actId="20577"/>
+        <pc:sldMkLst>
+          <pc:docMk/>
+          <pc:sldMk cId="3697271956" sldId="272"/>
+        </pc:sldMkLst>
+        <pc:spChg chg="mod">
+          <ac:chgData name="Guillaume Béland" userId="5e0e8ca1-aad6-45fd-bfe1-42de3018897a" providerId="ADAL" clId="{55D394F1-6066-4DF6-B78A-7FB94D6B7DC3}" dt="2025-02-19T18:55:49.202" v="137" actId="20577"/>
+          <ac:spMkLst>
+            <pc:docMk/>
+            <pc:sldMk cId="3697271956" sldId="272"/>
+            <ac:spMk id="2" creationId="{52B51FD6-1428-5239-B23B-16FE1952AF43}"/>
+          </ac:spMkLst>
+        </pc:spChg>
+      </pc:sldChg>
+      <pc:sldChg chg="modSp add mod">
+        <pc:chgData name="Guillaume Béland" userId="5e0e8ca1-aad6-45fd-bfe1-42de3018897a" providerId="ADAL" clId="{55D394F1-6066-4DF6-B78A-7FB94D6B7DC3}" dt="2025-02-19T18:55:55.362" v="144" actId="20577"/>
+        <pc:sldMkLst>
+          <pc:docMk/>
+          <pc:sldMk cId="319093066" sldId="273"/>
+        </pc:sldMkLst>
+        <pc:spChg chg="mod">
+          <ac:chgData name="Guillaume Béland" userId="5e0e8ca1-aad6-45fd-bfe1-42de3018897a" providerId="ADAL" clId="{55D394F1-6066-4DF6-B78A-7FB94D6B7DC3}" dt="2025-02-19T18:55:55.362" v="144" actId="20577"/>
+          <ac:spMkLst>
+            <pc:docMk/>
+            <pc:sldMk cId="319093066" sldId="273"/>
+            <ac:spMk id="2" creationId="{699ABA78-F3E2-B3D5-F8F3-EE53B234E290}"/>
+          </ac:spMkLst>
+        </pc:spChg>
+      </pc:sldChg>
+      <pc:sldChg chg="modSp new mod">
+        <pc:chgData name="Guillaume Béland" userId="5e0e8ca1-aad6-45fd-bfe1-42de3018897a" providerId="ADAL" clId="{55D394F1-6066-4DF6-B78A-7FB94D6B7DC3}" dt="2025-02-19T19:03:13.857" v="165" actId="20577"/>
+        <pc:sldMkLst>
+          <pc:docMk/>
+          <pc:sldMk cId="4038262255" sldId="274"/>
+        </pc:sldMkLst>
+        <pc:spChg chg="mod">
+          <ac:chgData name="Guillaume Béland" userId="5e0e8ca1-aad6-45fd-bfe1-42de3018897a" providerId="ADAL" clId="{55D394F1-6066-4DF6-B78A-7FB94D6B7DC3}" dt="2025-02-19T19:03:13.857" v="165" actId="20577"/>
+          <ac:spMkLst>
+            <pc:docMk/>
+            <pc:sldMk cId="4038262255" sldId="274"/>
+            <ac:spMk id="2" creationId="{139FD316-CF6C-A9B8-0193-40B717BE642C}"/>
+          </ac:spMkLst>
+        </pc:spChg>
+      </pc:sldChg>
+      <pc:sldChg chg="modSp new mod">
+        <pc:chgData name="Guillaume Béland" userId="5e0e8ca1-aad6-45fd-bfe1-42de3018897a" providerId="ADAL" clId="{55D394F1-6066-4DF6-B78A-7FB94D6B7DC3}" dt="2025-02-19T19:03:23.078" v="178" actId="20577"/>
+        <pc:sldMkLst>
+          <pc:docMk/>
+          <pc:sldMk cId="3607435681" sldId="275"/>
+        </pc:sldMkLst>
+        <pc:spChg chg="mod">
+          <ac:chgData name="Guillaume Béland" userId="5e0e8ca1-aad6-45fd-bfe1-42de3018897a" providerId="ADAL" clId="{55D394F1-6066-4DF6-B78A-7FB94D6B7DC3}" dt="2025-02-19T19:03:23.078" v="178" actId="20577"/>
+          <ac:spMkLst>
+            <pc:docMk/>
+            <pc:sldMk cId="3607435681" sldId="275"/>
+            <ac:spMk id="2" creationId="{B5B17956-83E7-A17E-FC98-FE87091379EA}"/>
+          </ac:spMkLst>
+        </pc:spChg>
+      </pc:sldChg>
+      <pc:sldChg chg="modSp new mod">
+        <pc:chgData name="Guillaume Béland" userId="5e0e8ca1-aad6-45fd-bfe1-42de3018897a" providerId="ADAL" clId="{55D394F1-6066-4DF6-B78A-7FB94D6B7DC3}" dt="2025-02-19T19:03:41.104" v="203" actId="5793"/>
+        <pc:sldMkLst>
+          <pc:docMk/>
+          <pc:sldMk cId="146015676" sldId="276"/>
+        </pc:sldMkLst>
+        <pc:spChg chg="mod">
+          <ac:chgData name="Guillaume Béland" userId="5e0e8ca1-aad6-45fd-bfe1-42de3018897a" providerId="ADAL" clId="{55D394F1-6066-4DF6-B78A-7FB94D6B7DC3}" dt="2025-02-19T19:03:32.921" v="189" actId="20577"/>
+          <ac:spMkLst>
+            <pc:docMk/>
+            <pc:sldMk cId="146015676" sldId="276"/>
+            <ac:spMk id="2" creationId="{EEE2610F-EFA2-78ED-E8F7-F702B6FCE283}"/>
+          </ac:spMkLst>
+        </pc:spChg>
+        <pc:spChg chg="mod">
+          <ac:chgData name="Guillaume Béland" userId="5e0e8ca1-aad6-45fd-bfe1-42de3018897a" providerId="ADAL" clId="{55D394F1-6066-4DF6-B78A-7FB94D6B7DC3}" dt="2025-02-19T19:03:41.104" v="203" actId="5793"/>
+          <ac:spMkLst>
+            <pc:docMk/>
+            <pc:sldMk cId="146015676" sldId="276"/>
+            <ac:spMk id="3" creationId="{D7586B91-C1AE-FC0E-A230-D1456895D7A9}"/>
+          </ac:spMkLst>
+        </pc:spChg>
+      </pc:sldChg>
+    </pc:docChg>
+  </pc:docChgLst>
   <pc:docChgLst>
     <pc:chgData name="Hugo Bergeron" userId="59293051-4354-40d9-86fb-fdc9df8c71c9" providerId="ADAL" clId="{E9AFCF45-42EA-40EF-8C91-A07AB6F9A7F4}"/>
     <pc:docChg chg="custSel modSld">
@@ -162,6 +426,38 @@
       </pc:sldChg>
     </pc:docChg>
   </pc:docChgLst>
+  <pc:docChgLst>
+    <pc:chgData name="Rémi Jetté" userId="53c7ddef-1adc-46a1-8967-7ad9ba7529bc" providerId="ADAL" clId="{2C907C7A-4113-0942-8F2F-451F683F8144}"/>
+    <pc:docChg chg="modSld">
+      <pc:chgData name="Rémi Jetté" userId="53c7ddef-1adc-46a1-8967-7ad9ba7529bc" providerId="ADAL" clId="{2C907C7A-4113-0942-8F2F-451F683F8144}" dt="2025-02-26T00:22:35.096" v="9" actId="1076"/>
+      <pc:docMkLst>
+        <pc:docMk/>
+      </pc:docMkLst>
+      <pc:sldChg chg="modSp mod">
+        <pc:chgData name="Rémi Jetté" userId="53c7ddef-1adc-46a1-8967-7ad9ba7529bc" providerId="ADAL" clId="{2C907C7A-4113-0942-8F2F-451F683F8144}" dt="2025-02-26T00:22:35.096" v="9" actId="1076"/>
+        <pc:sldMkLst>
+          <pc:docMk/>
+          <pc:sldMk cId="1646788340" sldId="257"/>
+        </pc:sldMkLst>
+        <pc:picChg chg="mod">
+          <ac:chgData name="Rémi Jetté" userId="53c7ddef-1adc-46a1-8967-7ad9ba7529bc" providerId="ADAL" clId="{2C907C7A-4113-0942-8F2F-451F683F8144}" dt="2025-02-26T00:22:35.096" v="9" actId="1076"/>
+          <ac:picMkLst>
+            <pc:docMk/>
+            <pc:sldMk cId="1646788340" sldId="257"/>
+            <ac:picMk id="5" creationId="{0FCA3DDE-9669-D568-B0F7-B203F81A2E95}"/>
+          </ac:picMkLst>
+        </pc:picChg>
+        <pc:picChg chg="mod">
+          <ac:chgData name="Rémi Jetté" userId="53c7ddef-1adc-46a1-8967-7ad9ba7529bc" providerId="ADAL" clId="{2C907C7A-4113-0942-8F2F-451F683F8144}" dt="2025-02-26T00:22:24.207" v="4" actId="1076"/>
+          <ac:picMkLst>
+            <pc:docMk/>
+            <pc:sldMk cId="1646788340" sldId="257"/>
+            <ac:picMk id="7" creationId="{B605890D-BD52-3785-C0B4-28EAB48B2B96}"/>
+          </ac:picMkLst>
+        </pc:picChg>
+      </pc:sldChg>
+    </pc:docChg>
+  </pc:docChgLst>
 </pc:chgInfo>
 </file>
 
@@ -314,7 +610,7 @@
           <a:p>
             <a:fld id="{46D4C36F-27DC-4680-BA92-43F8A947E2F0}" type="datetimeFigureOut">
               <a:rPr lang="en-CA" smtClean="0"/>
-              <a:t>2025-01-22</a:t>
+              <a:t>2025-02-25</a:t>
             </a:fld>
             <a:endParaRPr lang="en-CA"/>
           </a:p>
@@ -368,7 +664,7 @@
           <a:p>
             <a:fld id="{2D75D6BE-1EEE-48A7-BD7D-78B5F3F58F08}" type="slidenum">
               <a:rPr lang="en-CA" smtClean="0"/>
-              <a:t>‹N°›</a:t>
+              <a:t>‹n°›</a:t>
             </a:fld>
             <a:endParaRPr lang="en-CA"/>
           </a:p>
@@ -514,7 +810,7 @@
           <a:p>
             <a:fld id="{46D4C36F-27DC-4680-BA92-43F8A947E2F0}" type="datetimeFigureOut">
               <a:rPr lang="en-CA" smtClean="0"/>
-              <a:t>2025-01-22</a:t>
+              <a:t>2025-02-25</a:t>
             </a:fld>
             <a:endParaRPr lang="en-CA"/>
           </a:p>
@@ -568,7 +864,7 @@
           <a:p>
             <a:fld id="{2D75D6BE-1EEE-48A7-BD7D-78B5F3F58F08}" type="slidenum">
               <a:rPr lang="en-CA" smtClean="0"/>
-              <a:t>‹N°›</a:t>
+              <a:t>‹n°›</a:t>
             </a:fld>
             <a:endParaRPr lang="en-CA"/>
           </a:p>
@@ -724,7 +1020,7 @@
           <a:p>
             <a:fld id="{46D4C36F-27DC-4680-BA92-43F8A947E2F0}" type="datetimeFigureOut">
               <a:rPr lang="en-CA" smtClean="0"/>
-              <a:t>2025-01-22</a:t>
+              <a:t>2025-02-25</a:t>
             </a:fld>
             <a:endParaRPr lang="en-CA"/>
           </a:p>
@@ -778,7 +1074,7 @@
           <a:p>
             <a:fld id="{2D75D6BE-1EEE-48A7-BD7D-78B5F3F58F08}" type="slidenum">
               <a:rPr lang="en-CA" smtClean="0"/>
-              <a:t>‹N°›</a:t>
+              <a:t>‹n°›</a:t>
             </a:fld>
             <a:endParaRPr lang="en-CA"/>
           </a:p>
@@ -924,7 +1220,7 @@
           <a:p>
             <a:fld id="{46D4C36F-27DC-4680-BA92-43F8A947E2F0}" type="datetimeFigureOut">
               <a:rPr lang="en-CA" smtClean="0"/>
-              <a:t>2025-01-22</a:t>
+              <a:t>2025-02-25</a:t>
             </a:fld>
             <a:endParaRPr lang="en-CA"/>
           </a:p>
@@ -978,7 +1274,7 @@
           <a:p>
             <a:fld id="{2D75D6BE-1EEE-48A7-BD7D-78B5F3F58F08}" type="slidenum">
               <a:rPr lang="en-CA" smtClean="0"/>
-              <a:t>‹N°›</a:t>
+              <a:t>‹n°›</a:t>
             </a:fld>
             <a:endParaRPr lang="en-CA"/>
           </a:p>
@@ -1200,7 +1496,7 @@
           <a:p>
             <a:fld id="{46D4C36F-27DC-4680-BA92-43F8A947E2F0}" type="datetimeFigureOut">
               <a:rPr lang="en-CA" smtClean="0"/>
-              <a:t>2025-01-22</a:t>
+              <a:t>2025-02-25</a:t>
             </a:fld>
             <a:endParaRPr lang="en-CA"/>
           </a:p>
@@ -1254,7 +1550,7 @@
           <a:p>
             <a:fld id="{2D75D6BE-1EEE-48A7-BD7D-78B5F3F58F08}" type="slidenum">
               <a:rPr lang="en-CA" smtClean="0"/>
-              <a:t>‹N°›</a:t>
+              <a:t>‹n°›</a:t>
             </a:fld>
             <a:endParaRPr lang="en-CA"/>
           </a:p>
@@ -1468,7 +1764,7 @@
           <a:p>
             <a:fld id="{46D4C36F-27DC-4680-BA92-43F8A947E2F0}" type="datetimeFigureOut">
               <a:rPr lang="en-CA" smtClean="0"/>
-              <a:t>2025-01-22</a:t>
+              <a:t>2025-02-25</a:t>
             </a:fld>
             <a:endParaRPr lang="en-CA"/>
           </a:p>
@@ -1522,7 +1818,7 @@
           <a:p>
             <a:fld id="{2D75D6BE-1EEE-48A7-BD7D-78B5F3F58F08}" type="slidenum">
               <a:rPr lang="en-CA" smtClean="0"/>
-              <a:t>‹N°›</a:t>
+              <a:t>‹n°›</a:t>
             </a:fld>
             <a:endParaRPr lang="en-CA"/>
           </a:p>
@@ -1883,7 +2179,7 @@
           <a:p>
             <a:fld id="{46D4C36F-27DC-4680-BA92-43F8A947E2F0}" type="datetimeFigureOut">
               <a:rPr lang="en-CA" smtClean="0"/>
-              <a:t>2025-01-22</a:t>
+              <a:t>2025-02-25</a:t>
             </a:fld>
             <a:endParaRPr lang="en-CA"/>
           </a:p>
@@ -1937,7 +2233,7 @@
           <a:p>
             <a:fld id="{2D75D6BE-1EEE-48A7-BD7D-78B5F3F58F08}" type="slidenum">
               <a:rPr lang="en-CA" smtClean="0"/>
-              <a:t>‹N°›</a:t>
+              <a:t>‹n°›</a:t>
             </a:fld>
             <a:endParaRPr lang="en-CA"/>
           </a:p>
@@ -2025,7 +2321,7 @@
           <a:p>
             <a:fld id="{46D4C36F-27DC-4680-BA92-43F8A947E2F0}" type="datetimeFigureOut">
               <a:rPr lang="en-CA" smtClean="0"/>
-              <a:t>2025-01-22</a:t>
+              <a:t>2025-02-25</a:t>
             </a:fld>
             <a:endParaRPr lang="en-CA"/>
           </a:p>
@@ -2079,7 +2375,7 @@
           <a:p>
             <a:fld id="{2D75D6BE-1EEE-48A7-BD7D-78B5F3F58F08}" type="slidenum">
               <a:rPr lang="en-CA" smtClean="0"/>
-              <a:t>‹N°›</a:t>
+              <a:t>‹n°›</a:t>
             </a:fld>
             <a:endParaRPr lang="en-CA"/>
           </a:p>
@@ -2138,7 +2434,7 @@
           <a:p>
             <a:fld id="{46D4C36F-27DC-4680-BA92-43F8A947E2F0}" type="datetimeFigureOut">
               <a:rPr lang="en-CA" smtClean="0"/>
-              <a:t>2025-01-22</a:t>
+              <a:t>2025-02-25</a:t>
             </a:fld>
             <a:endParaRPr lang="en-CA"/>
           </a:p>
@@ -2192,7 +2488,7 @@
           <a:p>
             <a:fld id="{2D75D6BE-1EEE-48A7-BD7D-78B5F3F58F08}" type="slidenum">
               <a:rPr lang="en-CA" smtClean="0"/>
-              <a:t>‹N°›</a:t>
+              <a:t>‹n°›</a:t>
             </a:fld>
             <a:endParaRPr lang="en-CA"/>
           </a:p>
@@ -2451,7 +2747,7 @@
           <a:p>
             <a:fld id="{46D4C36F-27DC-4680-BA92-43F8A947E2F0}" type="datetimeFigureOut">
               <a:rPr lang="en-CA" smtClean="0"/>
-              <a:t>2025-01-22</a:t>
+              <a:t>2025-02-25</a:t>
             </a:fld>
             <a:endParaRPr lang="en-CA"/>
           </a:p>
@@ -2505,7 +2801,7 @@
           <a:p>
             <a:fld id="{2D75D6BE-1EEE-48A7-BD7D-78B5F3F58F08}" type="slidenum">
               <a:rPr lang="en-CA" smtClean="0"/>
-              <a:t>‹N°›</a:t>
+              <a:t>‹n°›</a:t>
             </a:fld>
             <a:endParaRPr lang="en-CA"/>
           </a:p>
@@ -2740,7 +3036,7 @@
           <a:p>
             <a:fld id="{46D4C36F-27DC-4680-BA92-43F8A947E2F0}" type="datetimeFigureOut">
               <a:rPr lang="en-CA" smtClean="0"/>
-              <a:t>2025-01-22</a:t>
+              <a:t>2025-02-25</a:t>
             </a:fld>
             <a:endParaRPr lang="en-CA"/>
           </a:p>
@@ -2794,7 +3090,7 @@
           <a:p>
             <a:fld id="{2D75D6BE-1EEE-48A7-BD7D-78B5F3F58F08}" type="slidenum">
               <a:rPr lang="en-CA" smtClean="0"/>
-              <a:t>‹N°›</a:t>
+              <a:t>‹n°›</a:t>
             </a:fld>
             <a:endParaRPr lang="en-CA"/>
           </a:p>
@@ -2983,7 +3279,7 @@
           <a:p>
             <a:fld id="{46D4C36F-27DC-4680-BA92-43F8A947E2F0}" type="datetimeFigureOut">
               <a:rPr lang="en-CA" smtClean="0"/>
-              <a:t>2025-01-22</a:t>
+              <a:t>2025-02-25</a:t>
             </a:fld>
             <a:endParaRPr lang="en-CA"/>
           </a:p>
@@ -3073,7 +3369,7 @@
           <a:p>
             <a:fld id="{2D75D6BE-1EEE-48A7-BD7D-78B5F3F58F08}" type="slidenum">
               <a:rPr lang="en-CA" smtClean="0"/>
-              <a:t>‹N°›</a:t>
+              <a:t>‹n°›</a:t>
             </a:fld>
             <a:endParaRPr lang="en-CA"/>
           </a:p>
@@ -3676,6 +3972,1042 @@
     <p:extLst>
       <p:ext uri="{BB962C8B-B14F-4D97-AF65-F5344CB8AC3E}">
         <p14:creationId xmlns:p14="http://schemas.microsoft.com/office/powerpoint/2010/main" val="787458944"/>
+      </p:ext>
+    </p:extLst>
+  </p:cSld>
+  <p:clrMapOvr>
+    <a:masterClrMapping/>
+  </p:clrMapOvr>
+</p:sld>
+</file>
+
+<file path=ppt/slides/slide10.xml><?xml version="1.0" encoding="utf-8"?>
+<p:sld xmlns:a="http://schemas.openxmlformats.org/drawingml/2006/main" xmlns:r="http://schemas.openxmlformats.org/officeDocument/2006/relationships" xmlns:p="http://schemas.openxmlformats.org/presentationml/2006/main">
+  <p:cSld>
+    <p:spTree>
+      <p:nvGrpSpPr>
+        <p:cNvPr id="1" name="">
+          <a:extLst>
+            <a:ext uri="{FF2B5EF4-FFF2-40B4-BE49-F238E27FC236}">
+              <a16:creationId xmlns:a16="http://schemas.microsoft.com/office/drawing/2014/main" id="{57FB5AAD-65D0-E024-EB41-B33EE6E32F9F}"/>
+            </a:ext>
+          </a:extLst>
+        </p:cNvPr>
+        <p:cNvGrpSpPr/>
+        <p:nvPr/>
+      </p:nvGrpSpPr>
+      <p:grpSpPr>
+        <a:xfrm>
+          <a:off x="0" y="0"/>
+          <a:ext cx="0" cy="0"/>
+          <a:chOff x="0" y="0"/>
+          <a:chExt cx="0" cy="0"/>
+        </a:xfrm>
+      </p:grpSpPr>
+      <p:sp>
+        <p:nvSpPr>
+          <p:cNvPr id="2" name="Titre 1">
+            <a:extLst>
+              <a:ext uri="{FF2B5EF4-FFF2-40B4-BE49-F238E27FC236}">
+                <a16:creationId xmlns:a16="http://schemas.microsoft.com/office/drawing/2014/main" id="{699ABA78-F3E2-B3D5-F8F3-EE53B234E290}"/>
+              </a:ext>
+            </a:extLst>
+          </p:cNvPr>
+          <p:cNvSpPr>
+            <a:spLocks noGrp="1"/>
+          </p:cNvSpPr>
+          <p:nvPr>
+            <p:ph type="title"/>
+          </p:nvPr>
+        </p:nvSpPr>
+        <p:spPr/>
+        <p:txBody>
+          <a:bodyPr/>
+          <a:lstStyle/>
+          <a:p>
+            <a:r>
+              <a:rPr lang="fr-CA" dirty="0"/>
+              <a:t>Info</a:t>
+            </a:r>
+          </a:p>
+        </p:txBody>
+      </p:sp>
+      <p:sp>
+        <p:nvSpPr>
+          <p:cNvPr id="3" name="Espace réservé du contenu 2">
+            <a:extLst>
+              <a:ext uri="{FF2B5EF4-FFF2-40B4-BE49-F238E27FC236}">
+                <a16:creationId xmlns:a16="http://schemas.microsoft.com/office/drawing/2014/main" id="{548091EF-57F1-9FC8-26D5-58816F92CB70}"/>
+              </a:ext>
+            </a:extLst>
+          </p:cNvPr>
+          <p:cNvSpPr>
+            <a:spLocks noGrp="1"/>
+          </p:cNvSpPr>
+          <p:nvPr>
+            <p:ph idx="1"/>
+          </p:nvPr>
+        </p:nvSpPr>
+        <p:spPr/>
+        <p:txBody>
+          <a:bodyPr/>
+          <a:lstStyle/>
+          <a:p>
+            <a:r>
+              <a:rPr lang="fr-CA" dirty="0"/>
+              <a:t>Requis</a:t>
+            </a:r>
+          </a:p>
+          <a:p>
+            <a:r>
+              <a:rPr lang="fr-CA" dirty="0"/>
+              <a:t>Contraintes</a:t>
+            </a:r>
+          </a:p>
+          <a:p>
+            <a:r>
+              <a:rPr lang="fr-CA" dirty="0"/>
+              <a:t>Conception</a:t>
+            </a:r>
+          </a:p>
+          <a:p>
+            <a:r>
+              <a:rPr lang="fr-CA" dirty="0"/>
+              <a:t>produit</a:t>
+            </a:r>
+          </a:p>
+        </p:txBody>
+      </p:sp>
+    </p:spTree>
+    <p:extLst>
+      <p:ext uri="{BB962C8B-B14F-4D97-AF65-F5344CB8AC3E}">
+        <p14:creationId xmlns:p14="http://schemas.microsoft.com/office/powerpoint/2010/main" val="319093066"/>
+      </p:ext>
+    </p:extLst>
+  </p:cSld>
+  <p:clrMapOvr>
+    <a:masterClrMapping/>
+  </p:clrMapOvr>
+</p:sld>
+</file>
+
+<file path=ppt/slides/slide11.xml><?xml version="1.0" encoding="utf-8"?>
+<p:sld xmlns:a="http://schemas.openxmlformats.org/drawingml/2006/main" xmlns:r="http://schemas.openxmlformats.org/officeDocument/2006/relationships" xmlns:p="http://schemas.openxmlformats.org/presentationml/2006/main">
+  <p:cSld>
+    <p:spTree>
+      <p:nvGrpSpPr>
+        <p:cNvPr id="1" name=""/>
+        <p:cNvGrpSpPr/>
+        <p:nvPr/>
+      </p:nvGrpSpPr>
+      <p:grpSpPr>
+        <a:xfrm>
+          <a:off x="0" y="0"/>
+          <a:ext cx="0" cy="0"/>
+          <a:chOff x="0" y="0"/>
+          <a:chExt cx="0" cy="0"/>
+        </a:xfrm>
+      </p:grpSpPr>
+      <p:sp>
+        <p:nvSpPr>
+          <p:cNvPr id="2" name="Titre 1">
+            <a:extLst>
+              <a:ext uri="{FF2B5EF4-FFF2-40B4-BE49-F238E27FC236}">
+                <a16:creationId xmlns:a16="http://schemas.microsoft.com/office/drawing/2014/main" id="{EEE2610F-EFA2-78ED-E8F7-F702B6FCE283}"/>
+              </a:ext>
+            </a:extLst>
+          </p:cNvPr>
+          <p:cNvSpPr>
+            <a:spLocks noGrp="1"/>
+          </p:cNvSpPr>
+          <p:nvPr>
+            <p:ph type="title"/>
+          </p:nvPr>
+        </p:nvSpPr>
+        <p:spPr/>
+        <p:txBody>
+          <a:bodyPr/>
+          <a:lstStyle/>
+          <a:p>
+            <a:r>
+              <a:rPr lang="fr-CA" dirty="0" err="1"/>
+              <a:t>Opensource</a:t>
+            </a:r>
+            <a:endParaRPr lang="fr-CA" dirty="0"/>
+          </a:p>
+        </p:txBody>
+      </p:sp>
+      <p:sp>
+        <p:nvSpPr>
+          <p:cNvPr id="3" name="Espace réservé du contenu 2">
+            <a:extLst>
+              <a:ext uri="{FF2B5EF4-FFF2-40B4-BE49-F238E27FC236}">
+                <a16:creationId xmlns:a16="http://schemas.microsoft.com/office/drawing/2014/main" id="{D7586B91-C1AE-FC0E-A230-D1456895D7A9}"/>
+              </a:ext>
+            </a:extLst>
+          </p:cNvPr>
+          <p:cNvSpPr>
+            <a:spLocks noGrp="1"/>
+          </p:cNvSpPr>
+          <p:nvPr>
+            <p:ph idx="1"/>
+          </p:nvPr>
+        </p:nvSpPr>
+        <p:spPr/>
+        <p:txBody>
+          <a:bodyPr/>
+          <a:lstStyle/>
+          <a:p>
+            <a:r>
+              <a:rPr lang="fr-CA" dirty="0"/>
+              <a:t>Git</a:t>
+            </a:r>
+          </a:p>
+          <a:p>
+            <a:r>
+              <a:rPr lang="fr-CA" dirty="0" err="1"/>
+              <a:t>Onshape</a:t>
+            </a:r>
+            <a:endParaRPr lang="fr-CA" dirty="0"/>
+          </a:p>
+          <a:p>
+            <a:endParaRPr lang="fr-CA" dirty="0"/>
+          </a:p>
+        </p:txBody>
+      </p:sp>
+    </p:spTree>
+    <p:extLst>
+      <p:ext uri="{BB962C8B-B14F-4D97-AF65-F5344CB8AC3E}">
+        <p14:creationId xmlns:p14="http://schemas.microsoft.com/office/powerpoint/2010/main" val="146015676"/>
+      </p:ext>
+    </p:extLst>
+  </p:cSld>
+  <p:clrMapOvr>
+    <a:masterClrMapping/>
+  </p:clrMapOvr>
+</p:sld>
+</file>
+
+<file path=ppt/slides/slide12.xml><?xml version="1.0" encoding="utf-8"?>
+<p:sld xmlns:a="http://schemas.openxmlformats.org/drawingml/2006/main" xmlns:r="http://schemas.openxmlformats.org/officeDocument/2006/relationships" xmlns:p="http://schemas.openxmlformats.org/presentationml/2006/main">
+  <p:cSld>
+    <p:spTree>
+      <p:nvGrpSpPr>
+        <p:cNvPr id="1" name=""/>
+        <p:cNvGrpSpPr/>
+        <p:nvPr/>
+      </p:nvGrpSpPr>
+      <p:grpSpPr>
+        <a:xfrm>
+          <a:off x="0" y="0"/>
+          <a:ext cx="0" cy="0"/>
+          <a:chOff x="0" y="0"/>
+          <a:chExt cx="0" cy="0"/>
+        </a:xfrm>
+      </p:grpSpPr>
+      <p:sp>
+        <p:nvSpPr>
+          <p:cNvPr id="2" name="Titre 1">
+            <a:extLst>
+              <a:ext uri="{FF2B5EF4-FFF2-40B4-BE49-F238E27FC236}">
+                <a16:creationId xmlns:a16="http://schemas.microsoft.com/office/drawing/2014/main" id="{139FD316-CF6C-A9B8-0193-40B717BE642C}"/>
+              </a:ext>
+            </a:extLst>
+          </p:cNvPr>
+          <p:cNvSpPr>
+            <a:spLocks noGrp="1"/>
+          </p:cNvSpPr>
+          <p:nvPr>
+            <p:ph type="title"/>
+          </p:nvPr>
+        </p:nvSpPr>
+        <p:spPr/>
+        <p:txBody>
+          <a:bodyPr/>
+          <a:lstStyle/>
+          <a:p>
+            <a:r>
+              <a:rPr lang="fr-CA" dirty="0"/>
+              <a:t>Utilisation</a:t>
+            </a:r>
+          </a:p>
+        </p:txBody>
+      </p:sp>
+      <p:sp>
+        <p:nvSpPr>
+          <p:cNvPr id="3" name="Espace réservé du contenu 2">
+            <a:extLst>
+              <a:ext uri="{FF2B5EF4-FFF2-40B4-BE49-F238E27FC236}">
+                <a16:creationId xmlns:a16="http://schemas.microsoft.com/office/drawing/2014/main" id="{57DE9C83-8F35-E86D-4262-9231E357B5A6}"/>
+              </a:ext>
+            </a:extLst>
+          </p:cNvPr>
+          <p:cNvSpPr>
+            <a:spLocks noGrp="1"/>
+          </p:cNvSpPr>
+          <p:nvPr>
+            <p:ph idx="1"/>
+          </p:nvPr>
+        </p:nvSpPr>
+        <p:spPr/>
+        <p:txBody>
+          <a:bodyPr/>
+          <a:lstStyle/>
+          <a:p>
+            <a:endParaRPr lang="fr-CA"/>
+          </a:p>
+        </p:txBody>
+      </p:sp>
+    </p:spTree>
+    <p:extLst>
+      <p:ext uri="{BB962C8B-B14F-4D97-AF65-F5344CB8AC3E}">
+        <p14:creationId xmlns:p14="http://schemas.microsoft.com/office/powerpoint/2010/main" val="4038262255"/>
+      </p:ext>
+    </p:extLst>
+  </p:cSld>
+  <p:clrMapOvr>
+    <a:masterClrMapping/>
+  </p:clrMapOvr>
+</p:sld>
+</file>
+
+<file path=ppt/slides/slide2.xml><?xml version="1.0" encoding="utf-8"?>
+<p:sld xmlns:a="http://schemas.openxmlformats.org/drawingml/2006/main" xmlns:r="http://schemas.openxmlformats.org/officeDocument/2006/relationships" xmlns:p="http://schemas.openxmlformats.org/presentationml/2006/main">
+  <p:cSld>
+    <p:spTree>
+      <p:nvGrpSpPr>
+        <p:cNvPr id="1" name=""/>
+        <p:cNvGrpSpPr/>
+        <p:nvPr/>
+      </p:nvGrpSpPr>
+      <p:grpSpPr>
+        <a:xfrm>
+          <a:off x="0" y="0"/>
+          <a:ext cx="0" cy="0"/>
+          <a:chOff x="0" y="0"/>
+          <a:chExt cx="0" cy="0"/>
+        </a:xfrm>
+      </p:grpSpPr>
+      <p:pic>
+        <p:nvPicPr>
+          <p:cNvPr id="5" name="Image 4">
+            <a:extLst>
+              <a:ext uri="{FF2B5EF4-FFF2-40B4-BE49-F238E27FC236}">
+                <a16:creationId xmlns:a16="http://schemas.microsoft.com/office/drawing/2014/main" id="{0FCA3DDE-9669-D568-B0F7-B203F81A2E95}"/>
+              </a:ext>
+            </a:extLst>
+          </p:cNvPr>
+          <p:cNvPicPr>
+            <a:picLocks noChangeAspect="1"/>
+          </p:cNvPicPr>
+          <p:nvPr/>
+        </p:nvPicPr>
+        <p:blipFill>
+          <a:blip r:embed="rId2"/>
+          <a:stretch>
+            <a:fillRect/>
+          </a:stretch>
+        </p:blipFill>
+        <p:spPr>
+          <a:xfrm>
+            <a:off x="199621" y="107375"/>
+            <a:ext cx="9481847" cy="2492024"/>
+          </a:xfrm>
+          <a:prstGeom prst="rect">
+            <a:avLst/>
+          </a:prstGeom>
+        </p:spPr>
+      </p:pic>
+      <p:pic>
+        <p:nvPicPr>
+          <p:cNvPr id="7" name="Image 6">
+            <a:extLst>
+              <a:ext uri="{FF2B5EF4-FFF2-40B4-BE49-F238E27FC236}">
+                <a16:creationId xmlns:a16="http://schemas.microsoft.com/office/drawing/2014/main" id="{B605890D-BD52-3785-C0B4-28EAB48B2B96}"/>
+              </a:ext>
+            </a:extLst>
+          </p:cNvPr>
+          <p:cNvPicPr>
+            <a:picLocks noChangeAspect="1"/>
+          </p:cNvPicPr>
+          <p:nvPr/>
+        </p:nvPicPr>
+        <p:blipFill>
+          <a:blip r:embed="rId3"/>
+          <a:stretch>
+            <a:fillRect/>
+          </a:stretch>
+        </p:blipFill>
+        <p:spPr>
+          <a:xfrm>
+            <a:off x="490143" y="2421047"/>
+            <a:ext cx="8900805" cy="4329578"/>
+          </a:xfrm>
+          <a:prstGeom prst="rect">
+            <a:avLst/>
+          </a:prstGeom>
+        </p:spPr>
+      </p:pic>
+    </p:spTree>
+    <p:extLst>
+      <p:ext uri="{BB962C8B-B14F-4D97-AF65-F5344CB8AC3E}">
+        <p14:creationId xmlns:p14="http://schemas.microsoft.com/office/powerpoint/2010/main" val="1646788340"/>
+      </p:ext>
+    </p:extLst>
+  </p:cSld>
+  <p:clrMapOvr>
+    <a:masterClrMapping/>
+  </p:clrMapOvr>
+</p:sld>
+</file>
+
+<file path=ppt/slides/slide3.xml><?xml version="1.0" encoding="utf-8"?>
+<p:sld xmlns:a="http://schemas.openxmlformats.org/drawingml/2006/main" xmlns:r="http://schemas.openxmlformats.org/officeDocument/2006/relationships" xmlns:p="http://schemas.openxmlformats.org/presentationml/2006/main">
+  <p:cSld>
+    <p:spTree>
+      <p:nvGrpSpPr>
+        <p:cNvPr id="1" name=""/>
+        <p:cNvGrpSpPr/>
+        <p:nvPr/>
+      </p:nvGrpSpPr>
+      <p:grpSpPr>
+        <a:xfrm>
+          <a:off x="0" y="0"/>
+          <a:ext cx="0" cy="0"/>
+          <a:chOff x="0" y="0"/>
+          <a:chExt cx="0" cy="0"/>
+        </a:xfrm>
+      </p:grpSpPr>
+      <p:sp>
+        <p:nvSpPr>
+          <p:cNvPr id="2" name="Titre 1">
+            <a:extLst>
+              <a:ext uri="{FF2B5EF4-FFF2-40B4-BE49-F238E27FC236}">
+                <a16:creationId xmlns:a16="http://schemas.microsoft.com/office/drawing/2014/main" id="{4786A07D-A329-DC62-6B0E-BE93006E1EAC}"/>
+              </a:ext>
+            </a:extLst>
+          </p:cNvPr>
+          <p:cNvSpPr>
+            <a:spLocks noGrp="1"/>
+          </p:cNvSpPr>
+          <p:nvPr>
+            <p:ph type="title"/>
+          </p:nvPr>
+        </p:nvSpPr>
+        <p:spPr/>
+        <p:txBody>
+          <a:bodyPr/>
+          <a:lstStyle/>
+          <a:p>
+            <a:endParaRPr lang="fr-CA"/>
+          </a:p>
+        </p:txBody>
+      </p:sp>
+      <p:sp>
+        <p:nvSpPr>
+          <p:cNvPr id="3" name="Espace réservé du contenu 2">
+            <a:extLst>
+              <a:ext uri="{FF2B5EF4-FFF2-40B4-BE49-F238E27FC236}">
+                <a16:creationId xmlns:a16="http://schemas.microsoft.com/office/drawing/2014/main" id="{542CCF65-0A44-6B77-B780-A2C235D93D61}"/>
+              </a:ext>
+            </a:extLst>
+          </p:cNvPr>
+          <p:cNvSpPr>
+            <a:spLocks noGrp="1"/>
+          </p:cNvSpPr>
+          <p:nvPr>
+            <p:ph idx="1"/>
+          </p:nvPr>
+        </p:nvSpPr>
+        <p:spPr/>
+        <p:txBody>
+          <a:bodyPr/>
+          <a:lstStyle/>
+          <a:p>
+            <a:endParaRPr lang="fr-CA" dirty="0"/>
+          </a:p>
+        </p:txBody>
+      </p:sp>
+      <p:pic>
+        <p:nvPicPr>
+          <p:cNvPr id="5" name="Image 4">
+            <a:extLst>
+              <a:ext uri="{FF2B5EF4-FFF2-40B4-BE49-F238E27FC236}">
+                <a16:creationId xmlns:a16="http://schemas.microsoft.com/office/drawing/2014/main" id="{AE3CBFF0-62E4-CDA0-5394-9B1357F7E51F}"/>
+              </a:ext>
+            </a:extLst>
+          </p:cNvPr>
+          <p:cNvPicPr>
+            <a:picLocks noChangeAspect="1"/>
+          </p:cNvPicPr>
+          <p:nvPr/>
+        </p:nvPicPr>
+        <p:blipFill>
+          <a:blip r:embed="rId2"/>
+          <a:srcRect b="58517"/>
+          <a:stretch/>
+        </p:blipFill>
+        <p:spPr>
+          <a:xfrm>
+            <a:off x="203006" y="265995"/>
+            <a:ext cx="11525089" cy="3119260"/>
+          </a:xfrm>
+          <a:prstGeom prst="rect">
+            <a:avLst/>
+          </a:prstGeom>
+        </p:spPr>
+      </p:pic>
+    </p:spTree>
+    <p:extLst>
+      <p:ext uri="{BB962C8B-B14F-4D97-AF65-F5344CB8AC3E}">
+        <p14:creationId xmlns:p14="http://schemas.microsoft.com/office/powerpoint/2010/main" val="3381310881"/>
+      </p:ext>
+    </p:extLst>
+  </p:cSld>
+  <p:clrMapOvr>
+    <a:masterClrMapping/>
+  </p:clrMapOvr>
+</p:sld>
+</file>
+
+<file path=ppt/slides/slide4.xml><?xml version="1.0" encoding="utf-8"?>
+<p:sld xmlns:a="http://schemas.openxmlformats.org/drawingml/2006/main" xmlns:r="http://schemas.openxmlformats.org/officeDocument/2006/relationships" xmlns:p="http://schemas.openxmlformats.org/presentationml/2006/main">
+  <p:cSld>
+    <p:spTree>
+      <p:nvGrpSpPr>
+        <p:cNvPr id="1" name=""/>
+        <p:cNvGrpSpPr/>
+        <p:nvPr/>
+      </p:nvGrpSpPr>
+      <p:grpSpPr>
+        <a:xfrm>
+          <a:off x="0" y="0"/>
+          <a:ext cx="0" cy="0"/>
+          <a:chOff x="0" y="0"/>
+          <a:chExt cx="0" cy="0"/>
+        </a:xfrm>
+      </p:grpSpPr>
+      <p:sp>
+        <p:nvSpPr>
+          <p:cNvPr id="2" name="Titre 1">
+            <a:extLst>
+              <a:ext uri="{FF2B5EF4-FFF2-40B4-BE49-F238E27FC236}">
+                <a16:creationId xmlns:a16="http://schemas.microsoft.com/office/drawing/2014/main" id="{DC949780-FA16-5E70-E105-128DC080D830}"/>
+              </a:ext>
+            </a:extLst>
+          </p:cNvPr>
+          <p:cNvSpPr>
+            <a:spLocks noGrp="1"/>
+          </p:cNvSpPr>
+          <p:nvPr>
+            <p:ph type="title"/>
+          </p:nvPr>
+        </p:nvSpPr>
+        <p:spPr/>
+        <p:txBody>
+          <a:bodyPr/>
+          <a:lstStyle/>
+          <a:p>
+            <a:r>
+              <a:rPr lang="fr-CA" dirty="0"/>
+              <a:t>Équipe</a:t>
+            </a:r>
+          </a:p>
+        </p:txBody>
+      </p:sp>
+      <p:sp>
+        <p:nvSpPr>
+          <p:cNvPr id="3" name="Espace réservé du contenu 2">
+            <a:extLst>
+              <a:ext uri="{FF2B5EF4-FFF2-40B4-BE49-F238E27FC236}">
+                <a16:creationId xmlns:a16="http://schemas.microsoft.com/office/drawing/2014/main" id="{9AA469C3-AA34-0ED4-1B12-54CBABCB44A5}"/>
+              </a:ext>
+            </a:extLst>
+          </p:cNvPr>
+          <p:cNvSpPr>
+            <a:spLocks noGrp="1"/>
+          </p:cNvSpPr>
+          <p:nvPr>
+            <p:ph idx="1"/>
+          </p:nvPr>
+        </p:nvSpPr>
+        <p:spPr/>
+        <p:txBody>
+          <a:bodyPr/>
+          <a:lstStyle/>
+          <a:p>
+            <a:endParaRPr lang="fr-CA"/>
+          </a:p>
+        </p:txBody>
+      </p:sp>
+    </p:spTree>
+    <p:extLst>
+      <p:ext uri="{BB962C8B-B14F-4D97-AF65-F5344CB8AC3E}">
+        <p14:creationId xmlns:p14="http://schemas.microsoft.com/office/powerpoint/2010/main" val="2633862120"/>
+      </p:ext>
+    </p:extLst>
+  </p:cSld>
+  <p:clrMapOvr>
+    <a:masterClrMapping/>
+  </p:clrMapOvr>
+</p:sld>
+</file>
+
+<file path=ppt/slides/slide5.xml><?xml version="1.0" encoding="utf-8"?>
+<p:sld xmlns:a="http://schemas.openxmlformats.org/drawingml/2006/main" xmlns:r="http://schemas.openxmlformats.org/officeDocument/2006/relationships" xmlns:p="http://schemas.openxmlformats.org/presentationml/2006/main">
+  <p:cSld>
+    <p:spTree>
+      <p:nvGrpSpPr>
+        <p:cNvPr id="1" name=""/>
+        <p:cNvGrpSpPr/>
+        <p:nvPr/>
+      </p:nvGrpSpPr>
+      <p:grpSpPr>
+        <a:xfrm>
+          <a:off x="0" y="0"/>
+          <a:ext cx="0" cy="0"/>
+          <a:chOff x="0" y="0"/>
+          <a:chExt cx="0" cy="0"/>
+        </a:xfrm>
+      </p:grpSpPr>
+      <p:sp>
+        <p:nvSpPr>
+          <p:cNvPr id="2" name="Titre 1">
+            <a:extLst>
+              <a:ext uri="{FF2B5EF4-FFF2-40B4-BE49-F238E27FC236}">
+                <a16:creationId xmlns:a16="http://schemas.microsoft.com/office/drawing/2014/main" id="{018CE68B-1906-CE2B-C12D-C1120444AEFD}"/>
+              </a:ext>
+            </a:extLst>
+          </p:cNvPr>
+          <p:cNvSpPr>
+            <a:spLocks noGrp="1"/>
+          </p:cNvSpPr>
+          <p:nvPr>
+            <p:ph type="title"/>
+          </p:nvPr>
+        </p:nvSpPr>
+        <p:spPr/>
+        <p:txBody>
+          <a:bodyPr/>
+          <a:lstStyle/>
+          <a:p>
+            <a:r>
+              <a:rPr lang="fr-CA" dirty="0"/>
+              <a:t>objectifs</a:t>
+            </a:r>
+          </a:p>
+        </p:txBody>
+      </p:sp>
+      <p:sp>
+        <p:nvSpPr>
+          <p:cNvPr id="3" name="Espace réservé du contenu 2">
+            <a:extLst>
+              <a:ext uri="{FF2B5EF4-FFF2-40B4-BE49-F238E27FC236}">
+                <a16:creationId xmlns:a16="http://schemas.microsoft.com/office/drawing/2014/main" id="{245D7E68-D084-DEC1-3B72-91BC559B08DA}"/>
+              </a:ext>
+            </a:extLst>
+          </p:cNvPr>
+          <p:cNvSpPr>
+            <a:spLocks noGrp="1"/>
+          </p:cNvSpPr>
+          <p:nvPr>
+            <p:ph idx="1"/>
+          </p:nvPr>
+        </p:nvSpPr>
+        <p:spPr/>
+        <p:txBody>
+          <a:bodyPr/>
+          <a:lstStyle/>
+          <a:p>
+            <a:endParaRPr lang="fr-CA"/>
+          </a:p>
+        </p:txBody>
+      </p:sp>
+    </p:spTree>
+    <p:extLst>
+      <p:ext uri="{BB962C8B-B14F-4D97-AF65-F5344CB8AC3E}">
+        <p14:creationId xmlns:p14="http://schemas.microsoft.com/office/powerpoint/2010/main" val="2761858454"/>
+      </p:ext>
+    </p:extLst>
+  </p:cSld>
+  <p:clrMapOvr>
+    <a:masterClrMapping/>
+  </p:clrMapOvr>
+</p:sld>
+</file>
+
+<file path=ppt/slides/slide6.xml><?xml version="1.0" encoding="utf-8"?>
+<p:sld xmlns:a="http://schemas.openxmlformats.org/drawingml/2006/main" xmlns:r="http://schemas.openxmlformats.org/officeDocument/2006/relationships" xmlns:p="http://schemas.openxmlformats.org/presentationml/2006/main">
+  <p:cSld>
+    <p:spTree>
+      <p:nvGrpSpPr>
+        <p:cNvPr id="1" name=""/>
+        <p:cNvGrpSpPr/>
+        <p:nvPr/>
+      </p:nvGrpSpPr>
+      <p:grpSpPr>
+        <a:xfrm>
+          <a:off x="0" y="0"/>
+          <a:ext cx="0" cy="0"/>
+          <a:chOff x="0" y="0"/>
+          <a:chExt cx="0" cy="0"/>
+        </a:xfrm>
+      </p:grpSpPr>
+      <p:sp>
+        <p:nvSpPr>
+          <p:cNvPr id="2" name="Titre 1">
+            <a:extLst>
+              <a:ext uri="{FF2B5EF4-FFF2-40B4-BE49-F238E27FC236}">
+                <a16:creationId xmlns:a16="http://schemas.microsoft.com/office/drawing/2014/main" id="{0B578E11-147F-69DE-C9BD-CBE12A703B05}"/>
+              </a:ext>
+            </a:extLst>
+          </p:cNvPr>
+          <p:cNvSpPr>
+            <a:spLocks noGrp="1"/>
+          </p:cNvSpPr>
+          <p:nvPr>
+            <p:ph type="title"/>
+          </p:nvPr>
+        </p:nvSpPr>
+        <p:spPr/>
+        <p:txBody>
+          <a:bodyPr/>
+          <a:lstStyle/>
+          <a:p>
+            <a:r>
+              <a:rPr lang="fr-CA" dirty="0"/>
+              <a:t>Fonctionnalités visées</a:t>
+            </a:r>
+          </a:p>
+        </p:txBody>
+      </p:sp>
+      <p:sp>
+        <p:nvSpPr>
+          <p:cNvPr id="3" name="Espace réservé du contenu 2">
+            <a:extLst>
+              <a:ext uri="{FF2B5EF4-FFF2-40B4-BE49-F238E27FC236}">
+                <a16:creationId xmlns:a16="http://schemas.microsoft.com/office/drawing/2014/main" id="{941363FA-85F8-CAE8-A1F1-3472C197C626}"/>
+              </a:ext>
+            </a:extLst>
+          </p:cNvPr>
+          <p:cNvSpPr>
+            <a:spLocks noGrp="1"/>
+          </p:cNvSpPr>
+          <p:nvPr>
+            <p:ph idx="1"/>
+          </p:nvPr>
+        </p:nvSpPr>
+        <p:spPr/>
+        <p:txBody>
+          <a:bodyPr/>
+          <a:lstStyle/>
+          <a:p>
+            <a:endParaRPr lang="fr-CA"/>
+          </a:p>
+        </p:txBody>
+      </p:sp>
+    </p:spTree>
+    <p:extLst>
+      <p:ext uri="{BB962C8B-B14F-4D97-AF65-F5344CB8AC3E}">
+        <p14:creationId xmlns:p14="http://schemas.microsoft.com/office/powerpoint/2010/main" val="4022280378"/>
+      </p:ext>
+    </p:extLst>
+  </p:cSld>
+  <p:clrMapOvr>
+    <a:masterClrMapping/>
+  </p:clrMapOvr>
+</p:sld>
+</file>
+
+<file path=ppt/slides/slide7.xml><?xml version="1.0" encoding="utf-8"?>
+<p:sld xmlns:a="http://schemas.openxmlformats.org/drawingml/2006/main" xmlns:r="http://schemas.openxmlformats.org/officeDocument/2006/relationships" xmlns:p="http://schemas.openxmlformats.org/presentationml/2006/main">
+  <p:cSld>
+    <p:spTree>
+      <p:nvGrpSpPr>
+        <p:cNvPr id="1" name=""/>
+        <p:cNvGrpSpPr/>
+        <p:nvPr/>
+      </p:nvGrpSpPr>
+      <p:grpSpPr>
+        <a:xfrm>
+          <a:off x="0" y="0"/>
+          <a:ext cx="0" cy="0"/>
+          <a:chOff x="0" y="0"/>
+          <a:chExt cx="0" cy="0"/>
+        </a:xfrm>
+      </p:grpSpPr>
+      <p:sp>
+        <p:nvSpPr>
+          <p:cNvPr id="2" name="Titre 1">
+            <a:extLst>
+              <a:ext uri="{FF2B5EF4-FFF2-40B4-BE49-F238E27FC236}">
+                <a16:creationId xmlns:a16="http://schemas.microsoft.com/office/drawing/2014/main" id="{B5B17956-83E7-A17E-FC98-FE87091379EA}"/>
+              </a:ext>
+            </a:extLst>
+          </p:cNvPr>
+          <p:cNvSpPr>
+            <a:spLocks noGrp="1"/>
+          </p:cNvSpPr>
+          <p:nvPr>
+            <p:ph type="title"/>
+          </p:nvPr>
+        </p:nvSpPr>
+        <p:spPr/>
+        <p:txBody>
+          <a:bodyPr/>
+          <a:lstStyle/>
+          <a:p>
+            <a:r>
+              <a:rPr lang="fr-CA" dirty="0"/>
+              <a:t>Organisation</a:t>
+            </a:r>
+          </a:p>
+        </p:txBody>
+      </p:sp>
+      <p:sp>
+        <p:nvSpPr>
+          <p:cNvPr id="3" name="Espace réservé du contenu 2">
+            <a:extLst>
+              <a:ext uri="{FF2B5EF4-FFF2-40B4-BE49-F238E27FC236}">
+                <a16:creationId xmlns:a16="http://schemas.microsoft.com/office/drawing/2014/main" id="{F982AD02-A20E-1135-0B20-3C5625B7400D}"/>
+              </a:ext>
+            </a:extLst>
+          </p:cNvPr>
+          <p:cNvSpPr>
+            <a:spLocks noGrp="1"/>
+          </p:cNvSpPr>
+          <p:nvPr>
+            <p:ph idx="1"/>
+          </p:nvPr>
+        </p:nvSpPr>
+        <p:spPr/>
+        <p:txBody>
+          <a:bodyPr/>
+          <a:lstStyle/>
+          <a:p>
+            <a:endParaRPr lang="fr-CA"/>
+          </a:p>
+        </p:txBody>
+      </p:sp>
+    </p:spTree>
+    <p:extLst>
+      <p:ext uri="{BB962C8B-B14F-4D97-AF65-F5344CB8AC3E}">
+        <p14:creationId xmlns:p14="http://schemas.microsoft.com/office/powerpoint/2010/main" val="3607435681"/>
+      </p:ext>
+    </p:extLst>
+  </p:cSld>
+  <p:clrMapOvr>
+    <a:masterClrMapping/>
+  </p:clrMapOvr>
+</p:sld>
+</file>
+
+<file path=ppt/slides/slide8.xml><?xml version="1.0" encoding="utf-8"?>
+<p:sld xmlns:a="http://schemas.openxmlformats.org/drawingml/2006/main" xmlns:r="http://schemas.openxmlformats.org/officeDocument/2006/relationships" xmlns:p="http://schemas.openxmlformats.org/presentationml/2006/main">
+  <p:cSld>
+    <p:spTree>
+      <p:nvGrpSpPr>
+        <p:cNvPr id="1" name=""/>
+        <p:cNvGrpSpPr/>
+        <p:nvPr/>
+      </p:nvGrpSpPr>
+      <p:grpSpPr>
+        <a:xfrm>
+          <a:off x="0" y="0"/>
+          <a:ext cx="0" cy="0"/>
+          <a:chOff x="0" y="0"/>
+          <a:chExt cx="0" cy="0"/>
+        </a:xfrm>
+      </p:grpSpPr>
+      <p:sp>
+        <p:nvSpPr>
+          <p:cNvPr id="2" name="Titre 1">
+            <a:extLst>
+              <a:ext uri="{FF2B5EF4-FFF2-40B4-BE49-F238E27FC236}">
+                <a16:creationId xmlns:a16="http://schemas.microsoft.com/office/drawing/2014/main" id="{1E3CAE03-8603-9C38-7F06-23010C358EBF}"/>
+              </a:ext>
+            </a:extLst>
+          </p:cNvPr>
+          <p:cNvSpPr>
+            <a:spLocks noGrp="1"/>
+          </p:cNvSpPr>
+          <p:nvPr>
+            <p:ph type="title"/>
+          </p:nvPr>
+        </p:nvSpPr>
+        <p:spPr/>
+        <p:txBody>
+          <a:bodyPr/>
+          <a:lstStyle/>
+          <a:p>
+            <a:r>
+              <a:rPr lang="fr-CA" dirty="0"/>
+              <a:t>mec</a:t>
+            </a:r>
+          </a:p>
+        </p:txBody>
+      </p:sp>
+      <p:sp>
+        <p:nvSpPr>
+          <p:cNvPr id="3" name="Espace réservé du contenu 2">
+            <a:extLst>
+              <a:ext uri="{FF2B5EF4-FFF2-40B4-BE49-F238E27FC236}">
+                <a16:creationId xmlns:a16="http://schemas.microsoft.com/office/drawing/2014/main" id="{50CC7F30-CC1C-12DF-3B55-59A7FE1396F4}"/>
+              </a:ext>
+            </a:extLst>
+          </p:cNvPr>
+          <p:cNvSpPr>
+            <a:spLocks noGrp="1"/>
+          </p:cNvSpPr>
+          <p:nvPr>
+            <p:ph idx="1"/>
+          </p:nvPr>
+        </p:nvSpPr>
+        <p:spPr/>
+        <p:txBody>
+          <a:bodyPr/>
+          <a:lstStyle/>
+          <a:p>
+            <a:r>
+              <a:rPr lang="fr-CA" dirty="0"/>
+              <a:t>Requis</a:t>
+            </a:r>
+          </a:p>
+          <a:p>
+            <a:r>
+              <a:rPr lang="fr-CA" dirty="0"/>
+              <a:t>Contraintes</a:t>
+            </a:r>
+          </a:p>
+          <a:p>
+            <a:r>
+              <a:rPr lang="fr-CA" dirty="0"/>
+              <a:t>Conception</a:t>
+            </a:r>
+          </a:p>
+          <a:p>
+            <a:r>
+              <a:rPr lang="fr-CA" dirty="0"/>
+              <a:t>produit</a:t>
+            </a:r>
+          </a:p>
+        </p:txBody>
+      </p:sp>
+    </p:spTree>
+    <p:extLst>
+      <p:ext uri="{BB962C8B-B14F-4D97-AF65-F5344CB8AC3E}">
+        <p14:creationId xmlns:p14="http://schemas.microsoft.com/office/powerpoint/2010/main" val="2048541269"/>
+      </p:ext>
+    </p:extLst>
+  </p:cSld>
+  <p:clrMapOvr>
+    <a:masterClrMapping/>
+  </p:clrMapOvr>
+</p:sld>
+</file>
+
+<file path=ppt/slides/slide9.xml><?xml version="1.0" encoding="utf-8"?>
+<p:sld xmlns:a="http://schemas.openxmlformats.org/drawingml/2006/main" xmlns:r="http://schemas.openxmlformats.org/officeDocument/2006/relationships" xmlns:p="http://schemas.openxmlformats.org/presentationml/2006/main">
+  <p:cSld>
+    <p:spTree>
+      <p:nvGrpSpPr>
+        <p:cNvPr id="1" name="">
+          <a:extLst>
+            <a:ext uri="{FF2B5EF4-FFF2-40B4-BE49-F238E27FC236}">
+              <a16:creationId xmlns:a16="http://schemas.microsoft.com/office/drawing/2014/main" id="{795B3714-04ED-EE6D-E3B0-9C8FC5AF9E0D}"/>
+            </a:ext>
+          </a:extLst>
+        </p:cNvPr>
+        <p:cNvGrpSpPr/>
+        <p:nvPr/>
+      </p:nvGrpSpPr>
+      <p:grpSpPr>
+        <a:xfrm>
+          <a:off x="0" y="0"/>
+          <a:ext cx="0" cy="0"/>
+          <a:chOff x="0" y="0"/>
+          <a:chExt cx="0" cy="0"/>
+        </a:xfrm>
+      </p:grpSpPr>
+      <p:sp>
+        <p:nvSpPr>
+          <p:cNvPr id="2" name="Titre 1">
+            <a:extLst>
+              <a:ext uri="{FF2B5EF4-FFF2-40B4-BE49-F238E27FC236}">
+                <a16:creationId xmlns:a16="http://schemas.microsoft.com/office/drawing/2014/main" id="{52B51FD6-1428-5239-B23B-16FE1952AF43}"/>
+              </a:ext>
+            </a:extLst>
+          </p:cNvPr>
+          <p:cNvSpPr>
+            <a:spLocks noGrp="1"/>
+          </p:cNvSpPr>
+          <p:nvPr>
+            <p:ph type="title"/>
+          </p:nvPr>
+        </p:nvSpPr>
+        <p:spPr/>
+        <p:txBody>
+          <a:bodyPr/>
+          <a:lstStyle/>
+          <a:p>
+            <a:r>
+              <a:rPr lang="fr-CA" dirty="0" err="1"/>
+              <a:t>elec</a:t>
+            </a:r>
+            <a:endParaRPr lang="fr-CA" dirty="0"/>
+          </a:p>
+        </p:txBody>
+      </p:sp>
+      <p:sp>
+        <p:nvSpPr>
+          <p:cNvPr id="3" name="Espace réservé du contenu 2">
+            <a:extLst>
+              <a:ext uri="{FF2B5EF4-FFF2-40B4-BE49-F238E27FC236}">
+                <a16:creationId xmlns:a16="http://schemas.microsoft.com/office/drawing/2014/main" id="{823DD1E8-49B0-1832-773C-D36B72B2951D}"/>
+              </a:ext>
+            </a:extLst>
+          </p:cNvPr>
+          <p:cNvSpPr>
+            <a:spLocks noGrp="1"/>
+          </p:cNvSpPr>
+          <p:nvPr>
+            <p:ph idx="1"/>
+          </p:nvPr>
+        </p:nvSpPr>
+        <p:spPr/>
+        <p:txBody>
+          <a:bodyPr/>
+          <a:lstStyle/>
+          <a:p>
+            <a:r>
+              <a:rPr lang="fr-CA" dirty="0"/>
+              <a:t>Requis</a:t>
+            </a:r>
+          </a:p>
+          <a:p>
+            <a:r>
+              <a:rPr lang="fr-CA" dirty="0"/>
+              <a:t>Contraintes</a:t>
+            </a:r>
+          </a:p>
+          <a:p>
+            <a:r>
+              <a:rPr lang="fr-CA" dirty="0"/>
+              <a:t>Conception</a:t>
+            </a:r>
+          </a:p>
+          <a:p>
+            <a:r>
+              <a:rPr lang="fr-CA" dirty="0"/>
+              <a:t>produit</a:t>
+            </a:r>
+          </a:p>
+        </p:txBody>
+      </p:sp>
+    </p:spTree>
+    <p:extLst>
+      <p:ext uri="{BB962C8B-B14F-4D97-AF65-F5344CB8AC3E}">
+        <p14:creationId xmlns:p14="http://schemas.microsoft.com/office/powerpoint/2010/main" val="3697271956"/>
       </p:ext>
     </p:extLst>
   </p:cSld>
@@ -4218,16 +5550,16 @@
 <file path=customXml/itemProps1.xml><?xml version="1.0" encoding="utf-8"?>
 <ds:datastoreItem xmlns:ds="http://schemas.openxmlformats.org/officeDocument/2006/customXml" ds:itemID="{C721AA11-7648-49A0-B209-BE3AB2EE083B}">
   <ds:schemaRefs>
-    <ds:schemaRef ds:uri="http://www.w3.org/XML/1998/namespace"/>
-    <ds:schemaRef ds:uri="http://purl.org/dc/dcmitype/"/>
-    <ds:schemaRef ds:uri="http://schemas.microsoft.com/office/2006/documentManagement/types"/>
-    <ds:schemaRef ds:uri="http://purl.org/dc/elements/1.1/"/>
-    <ds:schemaRef ds:uri="http://schemas.microsoft.com/office/infopath/2007/PartnerControls"/>
-    <ds:schemaRef ds:uri="http://schemas.openxmlformats.org/package/2006/metadata/core-properties"/>
     <ds:schemaRef ds:uri="46a673cc-2764-43ef-b926-9bf685717182"/>
     <ds:schemaRef ds:uri="d70271fb-e8d4-435d-98ba-d7e9b097c908"/>
+    <ds:schemaRef ds:uri="http://www.w3.org/XML/1998/namespace"/>
+    <ds:schemaRef ds:uri="http://schemas.openxmlformats.org/package/2006/metadata/core-properties"/>
+    <ds:schemaRef ds:uri="http://purl.org/dc/terms/"/>
+    <ds:schemaRef ds:uri="http://purl.org/dc/elements/1.1/"/>
+    <ds:schemaRef ds:uri="http://schemas.microsoft.com/office/2006/documentManagement/types"/>
+    <ds:schemaRef ds:uri="http://schemas.microsoft.com/office/infopath/2007/PartnerControls"/>
     <ds:schemaRef ds:uri="http://schemas.microsoft.com/office/2006/metadata/properties"/>
-    <ds:schemaRef ds:uri="http://purl.org/dc/terms/"/>
+    <ds:schemaRef ds:uri="http://purl.org/dc/dcmitype/"/>
   </ds:schemaRefs>
 </ds:datastoreItem>
 </file>
